--- a/print/가브리엘라_축복미사_초대장_A4.pptx
+++ b/print/가브리엘라_축복미사_초대장_A4.pptx
@@ -3421,7 +3421,7 @@
         <p:spPr>
           <a:xfrm>
             <a:off x="720000" y="3348000"/>
-            <a:ext cx="6120000" cy="1512000"/>
+            <a:ext cx="6120000" cy="1260000"/>
           </a:xfrm>
           <a:prstGeom prst="rect">
             <a:avLst/>
@@ -3441,7 +3441,7 @@
         </p:nvSpPr>
         <p:spPr>
           <a:xfrm>
-            <a:off x="720000" y="4932000"/>
+            <a:off x="720000" y="4680000"/>
             <a:ext cx="6120000" cy="180000"/>
           </a:xfrm>
           <a:prstGeom prst="rect">
@@ -3478,7 +3478,7 @@
         </p:nvSpPr>
         <p:spPr>
           <a:xfrm>
-            <a:off x="720000" y="5292000"/>
+            <a:off x="720000" y="5040000"/>
             <a:ext cx="6120000" cy="504000"/>
           </a:xfrm>
           <a:prstGeom prst="rect">
@@ -3537,7 +3537,7 @@
         </p:nvSpPr>
         <p:spPr>
           <a:xfrm>
-            <a:off x="720000" y="5868000"/>
+            <a:off x="720000" y="5616000"/>
             <a:ext cx="6120000" cy="288000"/>
           </a:xfrm>
           <a:prstGeom prst="rect">
@@ -3578,7 +3578,7 @@
         </p:nvSpPr>
         <p:spPr>
           <a:xfrm>
-            <a:off x="720000" y="6228000"/>
+            <a:off x="720000" y="5976000"/>
             <a:ext cx="6120000" cy="720000"/>
           </a:xfrm>
           <a:prstGeom prst="rect">
@@ -3655,7 +3655,7 @@
         </p:nvSpPr>
         <p:spPr>
           <a:xfrm>
-            <a:off x="720000" y="6948000"/>
+            <a:off x="720000" y="6696000"/>
             <a:ext cx="6120000" cy="288000"/>
           </a:xfrm>
           <a:prstGeom prst="rect">
@@ -3696,7 +3696,7 @@
         </p:nvCxnSpPr>
         <p:spPr>
           <a:xfrm>
-            <a:off x="720000" y="7380000"/>
+            <a:off x="720000" y="7128000"/>
             <a:ext cx="6120000" cy="0"/>
           </a:xfrm>
           <a:prstGeom prst="line">
@@ -3731,7 +3731,7 @@
         </p:nvSpPr>
         <p:spPr>
           <a:xfrm>
-            <a:off x="720000" y="7524000"/>
+            <a:off x="720000" y="7272000"/>
             <a:ext cx="6120000" cy="216000"/>
           </a:xfrm>
           <a:prstGeom prst="rect">
@@ -3768,7 +3768,7 @@
         </p:nvSpPr>
         <p:spPr>
           <a:xfrm>
-            <a:off x="720000" y="7848000"/>
+            <a:off x="720000" y="7596000"/>
             <a:ext cx="576000" cy="216000"/>
           </a:xfrm>
           <a:prstGeom prst="rect">
@@ -3805,7 +3805,7 @@
         </p:nvSpPr>
         <p:spPr>
           <a:xfrm>
-            <a:off x="1476000" y="7848000"/>
+            <a:off x="1476000" y="7596000"/>
             <a:ext cx="5364000" cy="216000"/>
           </a:xfrm>
           <a:prstGeom prst="rect">
@@ -3853,7 +3853,7 @@
         </p:nvCxnSpPr>
         <p:spPr>
           <a:xfrm>
-            <a:off x="720000" y="8064000"/>
+            <a:off x="720000" y="7812000"/>
             <a:ext cx="6120000" cy="0"/>
           </a:xfrm>
           <a:prstGeom prst="line">
@@ -3888,7 +3888,7 @@
         </p:nvSpPr>
         <p:spPr>
           <a:xfrm>
-            <a:off x="720000" y="8136000"/>
+            <a:off x="720000" y="7884000"/>
             <a:ext cx="576000" cy="216000"/>
           </a:xfrm>
           <a:prstGeom prst="rect">
@@ -3925,7 +3925,7 @@
         </p:nvSpPr>
         <p:spPr>
           <a:xfrm>
-            <a:off x="1476000" y="8136000"/>
+            <a:off x="1476000" y="7884000"/>
             <a:ext cx="5364000" cy="216000"/>
           </a:xfrm>
           <a:prstGeom prst="rect">
@@ -3973,7 +3973,7 @@
         </p:nvCxnSpPr>
         <p:spPr>
           <a:xfrm>
-            <a:off x="720000" y="8352000"/>
+            <a:off x="720000" y="8100000"/>
             <a:ext cx="6120000" cy="0"/>
           </a:xfrm>
           <a:prstGeom prst="line">
@@ -4008,7 +4008,7 @@
         </p:nvSpPr>
         <p:spPr>
           <a:xfrm>
-            <a:off x="720000" y="8424000"/>
+            <a:off x="720000" y="8172000"/>
             <a:ext cx="576000" cy="216000"/>
           </a:xfrm>
           <a:prstGeom prst="rect">
@@ -4045,7 +4045,7 @@
         </p:nvSpPr>
         <p:spPr>
           <a:xfrm>
-            <a:off x="1476000" y="8424000"/>
+            <a:off x="1476000" y="8172000"/>
             <a:ext cx="5364000" cy="216000"/>
           </a:xfrm>
           <a:prstGeom prst="rect">
@@ -4093,7 +4093,7 @@
         </p:nvCxnSpPr>
         <p:spPr>
           <a:xfrm>
-            <a:off x="720000" y="8856000"/>
+            <a:off x="720000" y="8604000"/>
             <a:ext cx="6120000" cy="0"/>
           </a:xfrm>
           <a:prstGeom prst="line">
@@ -4128,7 +4128,7 @@
         </p:nvSpPr>
         <p:spPr>
           <a:xfrm>
-            <a:off x="720000" y="9000000"/>
+            <a:off x="720000" y="8748000"/>
             <a:ext cx="2952000" cy="180000"/>
           </a:xfrm>
           <a:prstGeom prst="rect">
@@ -4165,7 +4165,7 @@
         </p:nvSpPr>
         <p:spPr>
           <a:xfrm>
-            <a:off x="720000" y="9198000"/>
+            <a:off x="720000" y="8946000"/>
             <a:ext cx="2952000" cy="504000"/>
           </a:xfrm>
           <a:prstGeom prst="rect">
@@ -4206,7 +4206,7 @@
         </p:nvSpPr>
         <p:spPr>
           <a:xfrm>
-            <a:off x="3888000" y="9000000"/>
+            <a:off x="3888000" y="8748000"/>
             <a:ext cx="2952000" cy="180000"/>
           </a:xfrm>
           <a:prstGeom prst="rect">
@@ -4230,7 +4230,7 @@
                 <a:ea typeface="나눔고딕"/>
                 <a:cs typeface="나눔고딕"/>
               </a:rPr>
-              <a:t>오시는 길</a:t>
+              <a:t>주차 안내</a:t>
             </a:r>
           </a:p>
         </p:txBody>
@@ -4243,7 +4243,7 @@
         </p:nvSpPr>
         <p:spPr>
           <a:xfrm>
-            <a:off x="3888000" y="9198000"/>
+            <a:off x="3888000" y="8946000"/>
             <a:ext cx="2952000" cy="504000"/>
           </a:xfrm>
           <a:prstGeom prst="rect">
@@ -4271,20 +4271,61 @@
                 <a:ea typeface="나눔명조"/>
                 <a:cs typeface="나눔명조"/>
               </a:rPr>
-              <a:t>주차 공간이 넉넉하지 않습니다. 가급적 대중교통을 이용해 주시면 감사하겠습니다.</a:t>
+              <a:t>가브리엘라 천사의 집 안에는 주차 공간이 부족합니다. 마니산 공영주차장에 주차해 주시면, 행사장까지 이동 차량을 운행합니다.</a:t>
+            </a:r>
+          </a:p>
+        </p:txBody>
+      </p:sp>
+      <p:sp>
+        <p:nvSpPr>
+          <p:cNvPr id="32" name="TextBox 31"/>
+          <p:cNvSpPr txBox="1"/>
+          <p:nvPr/>
+        </p:nvSpPr>
+        <p:spPr>
+          <a:xfrm>
+            <a:off x="3888000" y="9468000"/>
+            <a:ext cx="2952000" cy="216000"/>
+          </a:xfrm>
+          <a:prstGeom prst="rect">
+            <a:avLst/>
+          </a:prstGeom>
+          <a:noFill/>
+        </p:spPr>
+        <p:txBody>
+          <a:bodyPr wrap="square" lIns="0" rIns="0" tIns="0" bIns="0" anchor="t">
+            <a:spAutoFit/>
+          </a:bodyPr>
+          <a:lstStyle/>
+          <a:p>
+            <a:pPr algn="l">
+              <a:lnSpc>
+                <a:spcPct val="140000"/>
+              </a:lnSpc>
+            </a:pPr>
+            <a:r>
+              <a:rPr sz="800" b="0">
+                <a:solidFill>
+                  <a:srgbClr val="57665F"/>
+                </a:solidFill>
+                <a:latin typeface="나눔명조"/>
+                <a:ea typeface="나눔명조"/>
+                <a:cs typeface="나눔명조"/>
+              </a:rPr>
+              <a:t>인천광역시 강화군 화도면 마니산로675번길 18 (상방리 405-4)</a:t>
             </a:r>
           </a:p>
         </p:txBody>
       </p:sp>
       <p:cxnSp>
         <p:nvCxnSpPr>
-          <p:cNvPr id="32" name="Connector 31"/>
+          <p:cNvPr id="33" name="Connector 32"/>
           <p:cNvCxnSpPr/>
           <p:nvPr/>
         </p:nvCxnSpPr>
         <p:spPr>
           <a:xfrm>
-            <a:off x="720000" y="9684000"/>
+            <a:off x="720000" y="9756000"/>
             <a:ext cx="6120000" cy="0"/>
           </a:xfrm>
           <a:prstGeom prst="line">
@@ -4313,13 +4354,13 @@
       </p:cxnSp>
       <p:sp>
         <p:nvSpPr>
-          <p:cNvPr id="33" name="TextBox 32"/>
+          <p:cNvPr id="34" name="TextBox 33"/>
           <p:cNvSpPr txBox="1"/>
           <p:nvPr/>
         </p:nvSpPr>
         <p:spPr>
           <a:xfrm>
-            <a:off x="720000" y="9810000"/>
+            <a:off x="720000" y="9882000"/>
             <a:ext cx="6120000" cy="252000"/>
           </a:xfrm>
           <a:prstGeom prst="rect">
@@ -4350,14 +4391,14 @@
       </p:sp>
       <p:sp>
         <p:nvSpPr>
-          <p:cNvPr id="34" name="TextBox 33"/>
+          <p:cNvPr id="35" name="TextBox 34"/>
           <p:cNvSpPr txBox="1"/>
           <p:nvPr/>
         </p:nvSpPr>
         <p:spPr>
           <a:xfrm>
-            <a:off x="720000" y="10098000"/>
-            <a:ext cx="6120000" cy="216000"/>
+            <a:off x="720000" y="10116000"/>
+            <a:ext cx="6120000" cy="180000"/>
           </a:xfrm>
           <a:prstGeom prst="rect">
             <a:avLst/>

--- a/print/가브리엘라_축복미사_초대장_A4.pptx
+++ b/print/가브리엘라_축복미사_초대장_A4.pptx
@@ -4271,7 +4271,7 @@
                 <a:ea typeface="나눔명조"/>
                 <a:cs typeface="나눔명조"/>
               </a:rPr>
-              <a:t>가브리엘라 천사의 집 안에는 주차 공간이 부족합니다. 마니산 공영주차장에 주차해 주시면, 행사장까지 이동 차량을 운행합니다.</a:t>
+              <a:t>주차공간 부족으로 차량이동 분들께서는 마니산 공영 주차장을 이용하시고 행사장까지 차량이동 안내 받으시기 바랍니다.</a:t>
             </a:r>
           </a:p>
         </p:txBody>

--- a/print/가브리엘라_축복미사_초대장_A4.pptx
+++ b/print/가브리엘라_축복미사_초대장_A4.pptx
@@ -3912,7 +3912,7 @@
                 <a:ea typeface="나눔명조"/>
                 <a:cs typeface="나눔명조"/>
               </a:rPr>
-              <a:t>12:00</a:t>
+              <a:t>12:20</a:t>
             </a:r>
           </a:p>
         </p:txBody>

--- a/print/가브리엘라_축복미사_초대장_A4.pptx
+++ b/print/가브리엘라_축복미사_초대장_A4.pptx
@@ -3421,7 +3421,7 @@
         <p:spPr>
           <a:xfrm>
             <a:off x="720000" y="3348000"/>
-            <a:ext cx="6120000" cy="1260000"/>
+            <a:ext cx="6120000" cy="1080000"/>
           </a:xfrm>
           <a:prstGeom prst="rect">
             <a:avLst/>
@@ -3441,7 +3441,7 @@
         </p:nvSpPr>
         <p:spPr>
           <a:xfrm>
-            <a:off x="720000" y="4680000"/>
+            <a:off x="720000" y="4500000"/>
             <a:ext cx="6120000" cy="180000"/>
           </a:xfrm>
           <a:prstGeom prst="rect">
@@ -4193,7 +4193,43 @@
                 <a:ea typeface="나눔명조"/>
                 <a:cs typeface="나눔명조"/>
               </a:rPr>
-              <a:t>야외미사 집전입니다. 양산·모자 등 햇빛을 가릴 것과 개인 텀블러를 지참해 주시면 좋겠습니다.</a:t>
+              <a:t>야외미사 집전입니다.</a:t>
+            </a:r>
+          </a:p>
+          <a:p>
+            <a:pPr algn="l">
+              <a:lnSpc>
+                <a:spcPct val="145000"/>
+              </a:lnSpc>
+            </a:pPr>
+            <a:r>
+              <a:rPr sz="900" b="0">
+                <a:solidFill>
+                  <a:srgbClr val="1C2A25"/>
+                </a:solidFill>
+                <a:latin typeface="나눔명조"/>
+                <a:ea typeface="나눔명조"/>
+                <a:cs typeface="나눔명조"/>
+              </a:rPr>
+              <a:t>양산·모자 등 햇빛을 가릴 것과 개인</a:t>
+            </a:r>
+          </a:p>
+          <a:p>
+            <a:pPr algn="l">
+              <a:lnSpc>
+                <a:spcPct val="145000"/>
+              </a:lnSpc>
+            </a:pPr>
+            <a:r>
+              <a:rPr sz="900" b="0">
+                <a:solidFill>
+                  <a:srgbClr val="1C2A25"/>
+                </a:solidFill>
+                <a:latin typeface="나눔명조"/>
+                <a:ea typeface="나눔명조"/>
+                <a:cs typeface="나눔명조"/>
+              </a:rPr>
+              <a:t>텀블러를 지참해 주시면 좋겠습니다.</a:t>
             </a:r>
           </a:p>
         </p:txBody>
@@ -4271,7 +4307,61 @@
                 <a:ea typeface="나눔명조"/>
                 <a:cs typeface="나눔명조"/>
               </a:rPr>
-              <a:t>주차공간 부족으로 차량이동 분들께서는 마니산 공영 주차장을 이용하시고 행사장까지 차량이동 안내 받으시기 바랍니다.</a:t>
+              <a:t>주차공간 부족으로 차량이동</a:t>
+            </a:r>
+          </a:p>
+          <a:p>
+            <a:pPr algn="l">
+              <a:lnSpc>
+                <a:spcPct val="145000"/>
+              </a:lnSpc>
+            </a:pPr>
+            <a:r>
+              <a:rPr sz="900" b="0">
+                <a:solidFill>
+                  <a:srgbClr val="1C2A25"/>
+                </a:solidFill>
+                <a:latin typeface="나눔명조"/>
+                <a:ea typeface="나눔명조"/>
+                <a:cs typeface="나눔명조"/>
+              </a:rPr>
+              <a:t>분들께서는 마니산 공영 주차장을</a:t>
+            </a:r>
+          </a:p>
+          <a:p>
+            <a:pPr algn="l">
+              <a:lnSpc>
+                <a:spcPct val="145000"/>
+              </a:lnSpc>
+            </a:pPr>
+            <a:r>
+              <a:rPr sz="900" b="0">
+                <a:solidFill>
+                  <a:srgbClr val="1C2A25"/>
+                </a:solidFill>
+                <a:latin typeface="나눔명조"/>
+                <a:ea typeface="나눔명조"/>
+                <a:cs typeface="나눔명조"/>
+              </a:rPr>
+              <a:t>이용하시고 행사장까지 차량이동</a:t>
+            </a:r>
+          </a:p>
+          <a:p>
+            <a:pPr algn="l">
+              <a:lnSpc>
+                <a:spcPct val="145000"/>
+              </a:lnSpc>
+            </a:pPr>
+            <a:r>
+              <a:rPr sz="900" b="0">
+                <a:solidFill>
+                  <a:srgbClr val="1C2A25"/>
+                </a:solidFill>
+                <a:latin typeface="나눔명조"/>
+                <a:ea typeface="나눔명조"/>
+                <a:cs typeface="나눔명조"/>
+              </a:rPr>
+              <a:t>안내 받으시기 바랍니다.</a:t>
             </a:r>
           </a:p>
         </p:txBody>

--- a/print/가브리엘라_축복미사_초대장_A4.pptx
+++ b/print/가브리엘라_축복미사_초대장_A4.pptx
@@ -4193,7 +4193,7 @@
                 <a:ea typeface="나눔명조"/>
                 <a:cs typeface="나눔명조"/>
               </a:rPr>
-              <a:t>야외미사 집전입니다.</a:t>
+              <a:t>야외 미사 집전입니다.</a:t>
             </a:r>
           </a:p>
           <a:p>
@@ -4211,7 +4211,7 @@
                 <a:ea typeface="나눔명조"/>
                 <a:cs typeface="나눔명조"/>
               </a:rPr>
-              <a:t>양산·모자 등 햇빛을 가릴 것과 개인</a:t>
+              <a:t>양산·모자 등 햇빛을 가릴 것과 개인 텀블러를 지참해 주시면</a:t>
             </a:r>
           </a:p>
           <a:p>
@@ -4229,7 +4229,7 @@
                 <a:ea typeface="나눔명조"/>
                 <a:cs typeface="나눔명조"/>
               </a:rPr>
-              <a:t>텀블러를 지참해 주시면 좋겠습니다.</a:t>
+              <a:t>좋겠습니다.</a:t>
             </a:r>
           </a:p>
         </p:txBody>
@@ -4307,7 +4307,7 @@
                 <a:ea typeface="나눔명조"/>
                 <a:cs typeface="나눔명조"/>
               </a:rPr>
-              <a:t>주차공간 부족으로 차량이동</a:t>
+              <a:t>주차공간 부족으로 차량 이동 분들께서는</a:t>
             </a:r>
           </a:p>
           <a:p>
@@ -4325,7 +4325,7 @@
                 <a:ea typeface="나눔명조"/>
                 <a:cs typeface="나눔명조"/>
               </a:rPr>
-              <a:t>분들께서는 마니산 공영 주차장을</a:t>
+              <a:t>마니산 공영주차장을 이용하시고</a:t>
             </a:r>
           </a:p>
           <a:p>
@@ -4343,25 +4343,7 @@
                 <a:ea typeface="나눔명조"/>
                 <a:cs typeface="나눔명조"/>
               </a:rPr>
-              <a:t>이용하시고 행사장까지 차량이동</a:t>
-            </a:r>
-          </a:p>
-          <a:p>
-            <a:pPr algn="l">
-              <a:lnSpc>
-                <a:spcPct val="145000"/>
-              </a:lnSpc>
-            </a:pPr>
-            <a:r>
-              <a:rPr sz="900" b="0">
-                <a:solidFill>
-                  <a:srgbClr val="1C2A25"/>
-                </a:solidFill>
-                <a:latin typeface="나눔명조"/>
-                <a:ea typeface="나눔명조"/>
-                <a:cs typeface="나눔명조"/>
-              </a:rPr>
-              <a:t>안내 받으시기 바랍니다.</a:t>
+              <a:t>행사장까지 차량 이동 안내 받으시기 바랍니다.</a:t>
             </a:r>
           </a:p>
         </p:txBody>

--- a/print/가브리엘라_축복미사_초대장_A4.pptx
+++ b/print/가브리엘라_축복미사_초대장_A4.pptx
@@ -4193,7 +4193,7 @@
                 <a:ea typeface="나눔명조"/>
                 <a:cs typeface="나눔명조"/>
               </a:rPr>
-              <a:t>야외 미사 집전입니다.</a:t>
+              <a:t>야외미사 집전입니다. 양산·모자 등 햇빛을 가릴 것과 개인</a:t>
             </a:r>
           </a:p>
           <a:p>
@@ -4211,9 +4211,69 @@
                 <a:ea typeface="나눔명조"/>
                 <a:cs typeface="나눔명조"/>
               </a:rPr>
-              <a:t>양산·모자 등 햇빛을 가릴 것과 개인 텀블러를 지참해 주시면</a:t>
-            </a:r>
-          </a:p>
+              <a:t>텀블러를 지참해 주시면 좋겠습니다.</a:t>
+            </a:r>
+          </a:p>
+        </p:txBody>
+      </p:sp>
+      <p:sp>
+        <p:nvSpPr>
+          <p:cNvPr id="30" name="TextBox 29"/>
+          <p:cNvSpPr txBox="1"/>
+          <p:nvPr/>
+        </p:nvSpPr>
+        <p:spPr>
+          <a:xfrm>
+            <a:off x="3888000" y="8748000"/>
+            <a:ext cx="2952000" cy="180000"/>
+          </a:xfrm>
+          <a:prstGeom prst="rect">
+            <a:avLst/>
+          </a:prstGeom>
+          <a:noFill/>
+        </p:spPr>
+        <p:txBody>
+          <a:bodyPr wrap="square" lIns="0" rIns="0" tIns="0" bIns="0" anchor="t">
+            <a:spAutoFit/>
+          </a:bodyPr>
+          <a:lstStyle/>
+          <a:p>
+            <a:pPr algn="l"/>
+            <a:r>
+              <a:rPr sz="750" b="1" spc="180">
+                <a:solidFill>
+                  <a:srgbClr val="157A63"/>
+                </a:solidFill>
+                <a:latin typeface="나눔고딕"/>
+                <a:ea typeface="나눔고딕"/>
+                <a:cs typeface="나눔고딕"/>
+              </a:rPr>
+              <a:t>주차 안내</a:t>
+            </a:r>
+          </a:p>
+        </p:txBody>
+      </p:sp>
+      <p:sp>
+        <p:nvSpPr>
+          <p:cNvPr id="31" name="TextBox 30"/>
+          <p:cNvSpPr txBox="1"/>
+          <p:nvPr/>
+        </p:nvSpPr>
+        <p:spPr>
+          <a:xfrm>
+            <a:off x="3888000" y="8946000"/>
+            <a:ext cx="2952000" cy="504000"/>
+          </a:xfrm>
+          <a:prstGeom prst="rect">
+            <a:avLst/>
+          </a:prstGeom>
+          <a:noFill/>
+        </p:spPr>
+        <p:txBody>
+          <a:bodyPr wrap="square" lIns="0" rIns="0" tIns="0" bIns="0" anchor="t">
+            <a:spAutoFit/>
+          </a:bodyPr>
+          <a:lstStyle/>
           <a:p>
             <a:pPr algn="l">
               <a:lnSpc>
@@ -4229,69 +4289,9 @@
                 <a:ea typeface="나눔명조"/>
                 <a:cs typeface="나눔명조"/>
               </a:rPr>
-              <a:t>좋겠습니다.</a:t>
-            </a:r>
-          </a:p>
-        </p:txBody>
-      </p:sp>
-      <p:sp>
-        <p:nvSpPr>
-          <p:cNvPr id="30" name="TextBox 29"/>
-          <p:cNvSpPr txBox="1"/>
-          <p:nvPr/>
-        </p:nvSpPr>
-        <p:spPr>
-          <a:xfrm>
-            <a:off x="3888000" y="8748000"/>
-            <a:ext cx="2952000" cy="180000"/>
-          </a:xfrm>
-          <a:prstGeom prst="rect">
-            <a:avLst/>
-          </a:prstGeom>
-          <a:noFill/>
-        </p:spPr>
-        <p:txBody>
-          <a:bodyPr wrap="square" lIns="0" rIns="0" tIns="0" bIns="0" anchor="t">
-            <a:spAutoFit/>
-          </a:bodyPr>
-          <a:lstStyle/>
-          <a:p>
-            <a:pPr algn="l"/>
-            <a:r>
-              <a:rPr sz="750" b="1" spc="180">
-                <a:solidFill>
-                  <a:srgbClr val="157A63"/>
-                </a:solidFill>
-                <a:latin typeface="나눔고딕"/>
-                <a:ea typeface="나눔고딕"/>
-                <a:cs typeface="나눔고딕"/>
-              </a:rPr>
-              <a:t>주차 안내</a:t>
-            </a:r>
-          </a:p>
-        </p:txBody>
-      </p:sp>
-      <p:sp>
-        <p:nvSpPr>
-          <p:cNvPr id="31" name="TextBox 30"/>
-          <p:cNvSpPr txBox="1"/>
-          <p:nvPr/>
-        </p:nvSpPr>
-        <p:spPr>
-          <a:xfrm>
-            <a:off x="3888000" y="8946000"/>
-            <a:ext cx="2952000" cy="504000"/>
-          </a:xfrm>
-          <a:prstGeom prst="rect">
-            <a:avLst/>
-          </a:prstGeom>
-          <a:noFill/>
-        </p:spPr>
-        <p:txBody>
-          <a:bodyPr wrap="square" lIns="0" rIns="0" tIns="0" bIns="0" anchor="t">
-            <a:spAutoFit/>
-          </a:bodyPr>
-          <a:lstStyle/>
+              <a:t>가브리엘라 천사의 집 안에는 주차 공간이 부족합니다.</a:t>
+            </a:r>
+          </a:p>
           <a:p>
             <a:pPr algn="l">
               <a:lnSpc>
@@ -4307,7 +4307,7 @@
                 <a:ea typeface="나눔명조"/>
                 <a:cs typeface="나눔명조"/>
               </a:rPr>
-              <a:t>주차공간 부족으로 차량 이동 분들께서는</a:t>
+              <a:t>마니산 공영주차장에 주차해 주시면, 행사장까지 이동 차량을</a:t>
             </a:r>
           </a:p>
           <a:p>
@@ -4325,25 +4325,7 @@
                 <a:ea typeface="나눔명조"/>
                 <a:cs typeface="나눔명조"/>
               </a:rPr>
-              <a:t>마니산 공영주차장을 이용하시고</a:t>
-            </a:r>
-          </a:p>
-          <a:p>
-            <a:pPr algn="l">
-              <a:lnSpc>
-                <a:spcPct val="145000"/>
-              </a:lnSpc>
-            </a:pPr>
-            <a:r>
-              <a:rPr sz="900" b="0">
-                <a:solidFill>
-                  <a:srgbClr val="1C2A25"/>
-                </a:solidFill>
-                <a:latin typeface="나눔명조"/>
-                <a:ea typeface="나눔명조"/>
-                <a:cs typeface="나눔명조"/>
-              </a:rPr>
-              <a:t>행사장까지 차량 이동 안내 받으시기 바랍니다.</a:t>
+              <a:t>운행합니다.</a:t>
             </a:r>
           </a:p>
         </p:txBody>
